--- a/Agriculture seasonal data analysis.pptx
+++ b/Agriculture seasonal data analysis.pptx
@@ -5,10 +5,10 @@
     <p:sldMasterId id="2147483747" r:id="rId4"/>
   </p:sldMasterIdLst>
   <p:notesMasterIdLst>
-    <p:notesMasterId r:id="rId12"/>
+    <p:notesMasterId r:id="rId13"/>
   </p:notesMasterIdLst>
   <p:handoutMasterIdLst>
-    <p:handoutMasterId r:id="rId13"/>
+    <p:handoutMasterId r:id="rId14"/>
   </p:handoutMasterIdLst>
   <p:sldIdLst>
     <p:sldId id="338" r:id="rId5"/>
@@ -17,7 +17,8 @@
     <p:sldId id="329" r:id="rId8"/>
     <p:sldId id="302" r:id="rId9"/>
     <p:sldId id="339" r:id="rId10"/>
-    <p:sldId id="304" r:id="rId11"/>
+    <p:sldId id="340" r:id="rId11"/>
+    <p:sldId id="304" r:id="rId12"/>
   </p:sldIdLst>
   <p:sldSz cx="12192000" cy="6858000"/>
   <p:notesSz cx="6858000" cy="9144000"/>
@@ -151,14 +152,6 @@
     </p:ext>
   </p:extLst>
 </p:presentation>
-</file>
-
-<file path=ppt/revisionInfo.xml><?xml version="1.0" encoding="utf-8"?>
-<p1510:revInfo xmlns:a="http://schemas.openxmlformats.org/drawingml/2006/main" xmlns:r="http://schemas.openxmlformats.org/officeDocument/2006/relationships" xmlns:p1510="http://schemas.microsoft.com/office/powerpoint/2015/10/main">
-  <p1510:revLst>
-    <p1510:client id="{ED67BBC5-90FB-0B4C-ED85-F72C7BA7CE4A}" v="1" dt="2022-06-06T12:10:26.221"/>
-  </p1510:revLst>
-</p1510:revInfo>
 </file>
 
 <file path=ppt/handoutMasters/handoutMaster1.xml><?xml version="1.0" encoding="utf-8"?>
@@ -15736,6 +15729,94 @@
 </file>
 
 <file path=ppt/slides/slide7.xml><?xml version="1.0" encoding="utf-8"?>
+<p:sld xmlns:a="http://schemas.openxmlformats.org/drawingml/2006/main" xmlns:r="http://schemas.openxmlformats.org/officeDocument/2006/relationships" xmlns:p="http://schemas.openxmlformats.org/presentationml/2006/main">
+  <p:cSld>
+    <p:spTree>
+      <p:nvGrpSpPr>
+        <p:cNvPr id="1" name=""/>
+        <p:cNvGrpSpPr/>
+        <p:nvPr/>
+      </p:nvGrpSpPr>
+      <p:grpSpPr>
+        <a:xfrm>
+          <a:off x="0" y="0"/>
+          <a:ext cx="0" cy="0"/>
+          <a:chOff x="0" y="0"/>
+          <a:chExt cx="0" cy="0"/>
+        </a:xfrm>
+      </p:grpSpPr>
+      <p:sp>
+        <p:nvSpPr>
+          <p:cNvPr id="6" name="Title 5">
+            <a:extLst>
+              <a:ext uri="{FF2B5EF4-FFF2-40B4-BE49-F238E27FC236}">
+                <a16:creationId xmlns:a16="http://schemas.microsoft.com/office/drawing/2014/main" id="{29C8B7D4-6B88-4B92-166A-B586C8F70912}"/>
+              </a:ext>
+            </a:extLst>
+          </p:cNvPr>
+          <p:cNvSpPr>
+            <a:spLocks noGrp="1"/>
+          </p:cNvSpPr>
+          <p:nvPr>
+            <p:ph type="title"/>
+          </p:nvPr>
+        </p:nvSpPr>
+        <p:spPr/>
+        <p:txBody>
+          <a:bodyPr/>
+          <a:lstStyle/>
+          <a:p>
+            <a:r>
+              <a:rPr lang="en-IN" dirty="0"/>
+              <a:t>Data Visualization Certification</a:t>
+            </a:r>
+          </a:p>
+        </p:txBody>
+      </p:sp>
+      <p:pic>
+        <p:nvPicPr>
+          <p:cNvPr id="23" name="Picture 22">
+            <a:extLst>
+              <a:ext uri="{FF2B5EF4-FFF2-40B4-BE49-F238E27FC236}">
+                <a16:creationId xmlns:a16="http://schemas.microsoft.com/office/drawing/2014/main" id="{54682295-EFD8-D0B2-B4BC-57CC977F1D84}"/>
+              </a:ext>
+            </a:extLst>
+          </p:cNvPr>
+          <p:cNvPicPr>
+            <a:picLocks noChangeAspect="1"/>
+          </p:cNvPicPr>
+          <p:nvPr/>
+        </p:nvPicPr>
+        <p:blipFill>
+          <a:blip r:embed="rId2"/>
+          <a:stretch>
+            <a:fillRect/>
+          </a:stretch>
+        </p:blipFill>
+        <p:spPr>
+          <a:xfrm>
+            <a:off x="549113" y="1347814"/>
+            <a:ext cx="10013140" cy="5449828"/>
+          </a:xfrm>
+          <a:prstGeom prst="rect">
+            <a:avLst/>
+          </a:prstGeom>
+        </p:spPr>
+      </p:pic>
+    </p:spTree>
+    <p:extLst>
+      <p:ext uri="{BB962C8B-B14F-4D97-AF65-F5344CB8AC3E}">
+        <p14:creationId xmlns:p14="http://schemas.microsoft.com/office/powerpoint/2010/main" val="3317456349"/>
+      </p:ext>
+    </p:extLst>
+  </p:cSld>
+  <p:clrMapOvr>
+    <a:masterClrMapping/>
+  </p:clrMapOvr>
+</p:sld>
+</file>
+
+<file path=ppt/slides/slide8.xml><?xml version="1.0" encoding="utf-8"?>
 <p:sld xmlns:a="http://schemas.openxmlformats.org/drawingml/2006/main" xmlns:r="http://schemas.openxmlformats.org/officeDocument/2006/relationships" xmlns:p="http://schemas.openxmlformats.org/presentationml/2006/main">
   <p:cSld>
     <p:spTree>
